--- a/NLP_TM/proposal.pptx
+++ b/NLP_TM/proposal.pptx
@@ -205,7 +205,7 @@
           <a:p>
             <a:fld id="{407347E7-AB2C-4DCC-BC63-0B11171EA9A3}" type="datetimeFigureOut">
               <a:rPr lang="zh-TW" altLang="en-US" smtClean="0"/>
-              <a:t>2025/4/28</a:t>
+              <a:t>2026/4/28</a:t>
             </a:fld>
             <a:endParaRPr lang="zh-TW" altLang="en-US"/>
           </a:p>
@@ -825,7 +825,7 @@
           <a:p>
             <a:r>
               <a:rPr lang="en-US" altLang="zh-TW"/>
-              <a:t>Natural Language Processing and Text Mining, Spring 2025</a:t>
+              <a:t>Natural Language Processing and Text Mining, Spring 2026</a:t>
             </a:r>
             <a:endParaRPr lang="zh-TW" altLang="en-US"/>
           </a:p>
@@ -997,7 +997,7 @@
           <a:p>
             <a:r>
               <a:rPr lang="en-US" altLang="zh-TW"/>
-              <a:t>Natural Language Processing and Text Mining, Spring 2025</a:t>
+              <a:t>Natural Language Processing and Text Mining, Spring 2026</a:t>
             </a:r>
             <a:endParaRPr lang="zh-TW" altLang="en-US"/>
           </a:p>
@@ -1179,7 +1179,7 @@
           <a:p>
             <a:r>
               <a:rPr lang="en-US" altLang="zh-TW"/>
-              <a:t>Natural Language Processing and Text Mining, Spring 2025</a:t>
+              <a:t>Natural Language Processing and Text Mining, Spring 2026</a:t>
             </a:r>
             <a:endParaRPr lang="zh-TW" altLang="en-US"/>
           </a:p>
@@ -1351,7 +1351,7 @@
           <a:p>
             <a:r>
               <a:rPr lang="en-US" altLang="zh-TW"/>
-              <a:t>Natural Language Processing and Text Mining, Spring 2025</a:t>
+              <a:t>Natural Language Processing and Text Mining, Spring 2026</a:t>
             </a:r>
             <a:endParaRPr lang="zh-TW" altLang="en-US"/>
           </a:p>
@@ -1600,7 +1600,7 @@
           <a:p>
             <a:r>
               <a:rPr lang="en-US" altLang="zh-TW"/>
-              <a:t>Natural Language Processing and Text Mining, Spring 2025</a:t>
+              <a:t>Natural Language Processing and Text Mining, Spring 2026</a:t>
             </a:r>
             <a:endParaRPr lang="zh-TW" altLang="en-US"/>
           </a:p>
@@ -1833,7 +1833,7 @@
           <a:p>
             <a:r>
               <a:rPr lang="en-US" altLang="zh-TW"/>
-              <a:t>Natural Language Processing and Text Mining, Spring 2025</a:t>
+              <a:t>Natural Language Processing and Text Mining, Spring 2026</a:t>
             </a:r>
             <a:endParaRPr lang="zh-TW" altLang="en-US"/>
           </a:p>
@@ -2201,7 +2201,7 @@
           <a:p>
             <a:r>
               <a:rPr lang="en-US" altLang="zh-TW"/>
-              <a:t>Natural Language Processing and Text Mining, Spring 2025</a:t>
+              <a:t>Natural Language Processing and Text Mining, Spring 2026</a:t>
             </a:r>
             <a:endParaRPr lang="zh-TW" altLang="en-US"/>
           </a:p>
@@ -2322,7 +2322,7 @@
           <a:p>
             <a:r>
               <a:rPr lang="en-US" altLang="zh-TW"/>
-              <a:t>Natural Language Processing and Text Mining, Spring 2025</a:t>
+              <a:t>Natural Language Processing and Text Mining, Spring 2026</a:t>
             </a:r>
             <a:endParaRPr lang="zh-TW" altLang="en-US"/>
           </a:p>
@@ -2421,7 +2421,7 @@
           <a:p>
             <a:r>
               <a:rPr lang="en-US" altLang="zh-TW"/>
-              <a:t>Natural Language Processing and Text Mining, Spring 2025</a:t>
+              <a:t>Natural Language Processing and Text Mining, Spring 2026</a:t>
             </a:r>
             <a:endParaRPr lang="zh-TW" altLang="en-US"/>
           </a:p>
@@ -2700,7 +2700,7 @@
           <a:p>
             <a:r>
               <a:rPr lang="en-US" altLang="zh-TW"/>
-              <a:t>Natural Language Processing and Text Mining, Spring 2025</a:t>
+              <a:t>Natural Language Processing and Text Mining, Spring 2026</a:t>
             </a:r>
             <a:endParaRPr lang="zh-TW" altLang="en-US"/>
           </a:p>
@@ -2956,7 +2956,7 @@
           <a:p>
             <a:r>
               <a:rPr lang="en-US" altLang="zh-TW"/>
-              <a:t>Natural Language Processing and Text Mining, Spring 2025</a:t>
+              <a:t>Natural Language Processing and Text Mining, Spring 2026</a:t>
             </a:r>
             <a:endParaRPr lang="zh-TW" altLang="en-US"/>
           </a:p>
@@ -3171,7 +3171,7 @@
           <a:p>
             <a:r>
               <a:rPr lang="en-US" altLang="zh-TW"/>
-              <a:t>Natural Language Processing and Text Mining, Spring 2025</a:t>
+              <a:t>Natural Language Processing and Text Mining, Spring 2026</a:t>
             </a:r>
             <a:endParaRPr lang="zh-TW" altLang="en-US"/>
           </a:p>
@@ -3627,7 +3627,7 @@
           <a:p>
             <a:r>
               <a:rPr lang="en-US" altLang="zh-TW" dirty="0"/>
-              <a:t>Apr. 29, 2025</a:t>
+              <a:t>Apr. 30, 2026</a:t>
             </a:r>
             <a:endParaRPr lang="zh-TW" altLang="en-US" dirty="0"/>
           </a:p>
@@ -3656,7 +3656,7 @@
           <a:p>
             <a:r>
               <a:rPr lang="en-US" altLang="zh-TW"/>
-              <a:t>Natural Language Processing and Text Mining, Spring 2025</a:t>
+              <a:t>Natural Language Processing and Text Mining, Spring 2026</a:t>
             </a:r>
             <a:endParaRPr lang="zh-TW" altLang="en-US"/>
           </a:p>
@@ -3856,15 +3856,27 @@
             <a:pPr lvl="1"/>
             <a:r>
               <a:rPr lang="en-US" altLang="zh-TW" dirty="0"/>
-              <a:t>Proposal: *required* one week after the midterm (</a:t>
+              <a:t>Proposal: *required* </a:t>
             </a:r>
             <a:r>
               <a:rPr lang="en-US" altLang="zh-TW" dirty="0">
                 <a:solidFill>
+                  <a:srgbClr val="0000FF"/>
+                </a:solidFill>
+              </a:rPr>
+              <a:t>two weeks </a:t>
+            </a:r>
+            <a:r>
+              <a:rPr lang="en-US" altLang="zh-TW" dirty="0"/>
+              <a:t>after the midterm (</a:t>
+            </a:r>
+            <a:r>
+              <a:rPr lang="en-US" altLang="zh-TW" dirty="0">
+                <a:solidFill>
                   <a:srgbClr val="FF0000"/>
                 </a:solidFill>
               </a:rPr>
-              <a:t>May 6, 2025</a:t>
+              <a:t>May 7, 2026</a:t>
             </a:r>
             <a:r>
               <a:rPr lang="en-US" altLang="zh-TW" dirty="0"/>
@@ -3895,7 +3907,7 @@
                   <a:srgbClr val="FF0000"/>
                 </a:solidFill>
               </a:rPr>
-              <a:t>Jun. 3, 2025</a:t>
+              <a:t>Jun. 8, 2026</a:t>
             </a:r>
             <a:r>
               <a:rPr lang="en-US" altLang="zh-TW" dirty="0"/>
@@ -3914,7 +3926,7 @@
                   <a:srgbClr val="FF0000"/>
                 </a:solidFill>
               </a:rPr>
-              <a:t>Jun. 20, 2025</a:t>
+              <a:t>Jun. 26, 2026</a:t>
             </a:r>
             <a:r>
               <a:rPr lang="en-US" altLang="zh-TW" dirty="0"/>
@@ -3946,7 +3958,7 @@
           <a:p>
             <a:r>
               <a:rPr lang="en-US" altLang="zh-TW"/>
-              <a:t>Natural Language Processing and Text Mining, Spring 2025</a:t>
+              <a:t>Natural Language Processing and Text Mining, Spring 2026</a:t>
             </a:r>
             <a:endParaRPr lang="zh-TW" altLang="en-US"/>
           </a:p>
@@ -4168,7 +4180,7 @@
           <a:p>
             <a:r>
               <a:rPr lang="en-US" altLang="zh-TW"/>
-              <a:t>Natural Language Processing and Text Mining, Spring 2025</a:t>
+              <a:t>Natural Language Processing and Text Mining, Spring 2026</a:t>
             </a:r>
             <a:endParaRPr lang="zh-TW" altLang="en-US"/>
           </a:p>
@@ -4310,7 +4322,7 @@
                   <a:srgbClr val="FF0000"/>
                 </a:solidFill>
               </a:rPr>
-              <a:t>May 6, 2025</a:t>
+              <a:t>May 7, 2026</a:t>
             </a:r>
           </a:p>
           <a:p>
@@ -4360,7 +4372,7 @@
                   <a:srgbClr val="FF0000"/>
                 </a:solidFill>
               </a:rPr>
-              <a:t>Jun. 3, 2025</a:t>
+              <a:t>Jun. 8, 2026</a:t>
             </a:r>
           </a:p>
           <a:p>
@@ -4406,7 +4418,7 @@
           <a:p>
             <a:r>
               <a:rPr lang="en-US" altLang="zh-TW"/>
-              <a:t>Natural Language Processing and Text Mining, Spring 2025</a:t>
+              <a:t>Natural Language Processing and Text Mining, Spring 2026</a:t>
             </a:r>
             <a:endParaRPr lang="zh-TW" altLang="en-US"/>
           </a:p>
@@ -4655,11 +4667,14 @@
               <a:buNone/>
             </a:pPr>
             <a:r>
-              <a:rPr kumimoji="0" lang="en-US" altLang="zh-TW" sz="1400" dirty="0">
+              <a:rPr kumimoji="0" lang="en-US" altLang="zh-TW" sz="1400">
                 <a:latin typeface="Arial" panose="020B0604020202020204" pitchFamily="34" charset="0"/>
               </a:rPr>
-              <a:t>Natural Language Processing and Text Mining, Spring 2025</a:t>
-            </a:r>
+              <a:t>Natural Language Processing and Text Mining, Spring 2026</a:t>
+            </a:r>
+            <a:endParaRPr kumimoji="0" lang="en-US" altLang="zh-TW" sz="1400" dirty="0">
+              <a:latin typeface="Arial" panose="020B0604020202020204" pitchFamily="34" charset="0"/>
+            </a:endParaRPr>
           </a:p>
         </p:txBody>
       </p:sp>
@@ -5235,7 +5250,7 @@
                   <a:srgbClr val="0000FF"/>
                 </a:solidFill>
               </a:rPr>
-              <a:t>AI Cup 2025: </a:t>
+              <a:t>AI Cup 2026: </a:t>
             </a:r>
             <a:r>
               <a:rPr lang="en-US" altLang="zh-TW" dirty="0">
@@ -5244,7 +5259,7 @@
                 </a:solidFill>
                 <a:hlinkClick r:id="rId2"/>
               </a:rPr>
-              <a:t>https://www.aicup.tw/ai-cup-2025-competition</a:t>
+              <a:t>https://www.aicup.tw/ai-cup-2026-competition</a:t>
             </a:r>
             <a:r>
               <a:rPr lang="en-US" altLang="zh-TW" dirty="0">
@@ -5331,7 +5346,7 @@
           <a:p>
             <a:r>
               <a:rPr lang="en-US" altLang="zh-TW"/>
-              <a:t>Natural Language Processing and Text Mining, Spring 2025</a:t>
+              <a:t>Natural Language Processing and Text Mining, Spring 2026</a:t>
             </a:r>
             <a:endParaRPr lang="zh-TW" altLang="en-US"/>
           </a:p>
@@ -5442,7 +5457,7 @@
           <a:p>
             <a:r>
               <a:rPr lang="en-US" altLang="zh-TW" dirty="0"/>
-              <a:t>Regarding AI Cup 2025 Competition</a:t>
+              <a:t>Regarding AI Cup 2026 Competition</a:t>
             </a:r>
             <a:endParaRPr lang="zh-TW" altLang="en-US" dirty="0"/>
           </a:p>
@@ -5473,11 +5488,11 @@
               <a:rPr lang="en-US" altLang="zh-TW" dirty="0">
                 <a:hlinkClick r:id="rId2"/>
               </a:rPr>
-              <a:t>https://www.aicup.tw/ai-cup-2025-competition</a:t>
+              <a:t>https://www.aicup.tw/ai-cup-2026-competition</a:t>
             </a:r>
             <a:r>
               <a:rPr lang="en-US" altLang="zh-TW" dirty="0"/>
-              <a:t> </a:t>
+              <a:t>  </a:t>
             </a:r>
           </a:p>
           <a:p>
@@ -5494,7 +5509,7 @@
                   <a:srgbClr val="0000FF"/>
                 </a:solidFill>
               </a:rPr>
-              <a:t>桌球智慧球拍資料的精準分析競賽</a:t>
+              <a:t>基於時序資料之桌球戰術與結果預測競賽</a:t>
             </a:r>
             <a:r>
               <a:rPr lang="en-US" altLang="zh-TW" dirty="0">
@@ -5511,7 +5526,7 @@
               <a:rPr lang="en-US" altLang="zh-TW" dirty="0">
                 <a:hlinkClick r:id="rId3"/>
               </a:rPr>
-              <a:t>https://tbrain.trendmicro.com.tw/Competitions/Details/39</a:t>
+              <a:t>https://www.aidea-web.tw/topic/3f9662e8-9d18-4c6a-9332-103eded3a399</a:t>
             </a:r>
             <a:r>
               <a:rPr lang="en-US" altLang="zh-TW" dirty="0"/>
@@ -5528,7 +5543,7 @@
             <a:pPr lvl="1"/>
             <a:r>
               <a:rPr lang="en-US" altLang="zh-TW" dirty="0"/>
-              <a:t>Registration: Mar. 4, 2025</a:t>
+              <a:t>Registration: May 28, 2026</a:t>
             </a:r>
           </a:p>
           <a:p>
@@ -5543,20 +5558,20 @@
                   <a:srgbClr val="FF0000"/>
                 </a:solidFill>
               </a:rPr>
-              <a:t>23:59pm, Jun. 2, 2025</a:t>
+              <a:t>23:59pm, Jun. 2, 2026</a:t>
             </a:r>
           </a:p>
           <a:p>
             <a:pPr lvl="1"/>
             <a:r>
               <a:rPr lang="en-US" altLang="zh-TW" dirty="0"/>
-              <a:t>Announcement of final result: Jul. 17, 2025</a:t>
+              <a:t>Announcement of final result: 16:00pm, Jul. 17, 2026</a:t>
             </a:r>
           </a:p>
           <a:p>
             <a:r>
               <a:rPr lang="en-US" altLang="zh-TW" dirty="0"/>
-              <a:t>Prizes: top-19 places</a:t>
+              <a:t>Prizes: top-13 places</a:t>
             </a:r>
           </a:p>
           <a:p>
@@ -5722,7 +5737,7 @@
               <a:rPr kumimoji="0" lang="en-US" altLang="zh-TW" sz="1400">
                 <a:latin typeface="Arial" panose="020B0604020202020204" pitchFamily="34" charset="0"/>
               </a:rPr>
-              <a:t>Natural Language Processing and Text Mining, Spring 2025</a:t>
+              <a:t>Natural Language Processing and Text Mining, Spring 2026</a:t>
             </a:r>
           </a:p>
         </p:txBody>
@@ -6128,8 +6143,12 @@
           <a:lstStyle/>
           <a:p>
             <a:r>
+              <a:rPr lang="en-US" altLang="zh-TW" b="1" dirty="0"/>
+              <a:t>ESG</a:t>
+            </a:r>
+            <a:r>
               <a:rPr lang="zh-TW" altLang="en-US" b="1" dirty="0"/>
-              <a:t>醫病語音敏感個人資料辨識競賽</a:t>
+              <a:t>永續承諾驗證競賽</a:t>
             </a:r>
             <a:r>
               <a:rPr lang="en-US" altLang="zh-TW" b="1" dirty="0"/>
@@ -6142,7 +6161,7 @@
               <a:rPr lang="en-US" altLang="zh-TW" dirty="0">
                 <a:hlinkClick r:id="rId2"/>
               </a:rPr>
-              <a:t>https://www.codabench.org/competitions/4890</a:t>
+              <a:t>https://www.aidea-web.tw/aicup_veripromiseesg</a:t>
             </a:r>
             <a:r>
               <a:rPr lang="en-US" altLang="zh-TW" dirty="0"/>
@@ -6151,72 +6170,6 @@
           </a:p>
           <a:p>
             <a:pPr lvl="1"/>
-            <a:r>
-              <a:rPr lang="zh-TW" altLang="en-US" b="1" i="0" dirty="0">
-                <a:solidFill>
-                  <a:srgbClr val="2E2E2E"/>
-                </a:solidFill>
-                <a:effectLst/>
-                <a:latin typeface="Lato" panose="020F0502020204030203" pitchFamily="34" charset="0"/>
-              </a:rPr>
-              <a:t>子任務 </a:t>
-            </a:r>
-            <a:r>
-              <a:rPr lang="en-US" altLang="zh-TW" b="1" i="0" dirty="0">
-                <a:solidFill>
-                  <a:srgbClr val="2E2E2E"/>
-                </a:solidFill>
-                <a:effectLst/>
-                <a:latin typeface="Lato" panose="020F0502020204030203" pitchFamily="34" charset="0"/>
-              </a:rPr>
-              <a:t>1: </a:t>
-            </a:r>
-            <a:r>
-              <a:rPr lang="zh-TW" altLang="en-US" b="1" i="0" dirty="0">
-                <a:solidFill>
-                  <a:srgbClr val="2E2E2E"/>
-                </a:solidFill>
-                <a:effectLst/>
-                <a:latin typeface="Lato" panose="020F0502020204030203" pitchFamily="34" charset="0"/>
-              </a:rPr>
-              <a:t>醫病語音紀錄辨識</a:t>
-            </a:r>
-          </a:p>
-          <a:p>
-            <a:pPr lvl="1"/>
-            <a:r>
-              <a:rPr lang="zh-TW" altLang="en-US" b="1" i="0" dirty="0">
-                <a:solidFill>
-                  <a:srgbClr val="2E2E2E"/>
-                </a:solidFill>
-                <a:effectLst/>
-                <a:latin typeface="Lato" panose="020F0502020204030203" pitchFamily="34" charset="0"/>
-              </a:rPr>
-              <a:t>子任務 </a:t>
-            </a:r>
-            <a:r>
-              <a:rPr lang="en-US" altLang="zh-TW" b="1" i="0" dirty="0">
-                <a:solidFill>
-                  <a:srgbClr val="2E2E2E"/>
-                </a:solidFill>
-                <a:effectLst/>
-                <a:latin typeface="Lato" panose="020F0502020204030203" pitchFamily="34" charset="0"/>
-              </a:rPr>
-              <a:t>2</a:t>
-            </a:r>
-            <a:r>
-              <a:rPr lang="zh-TW" altLang="en-US" b="1" i="0" dirty="0">
-                <a:solidFill>
-                  <a:srgbClr val="2E2E2E"/>
-                </a:solidFill>
-                <a:effectLst/>
-                <a:latin typeface="Lato" panose="020F0502020204030203" pitchFamily="34" charset="0"/>
-              </a:rPr>
-              <a:t>：醫病語音隱私個資辨識</a:t>
-            </a:r>
-          </a:p>
-          <a:p>
-            <a:pPr lvl="1"/>
             <a:endParaRPr lang="en-US" altLang="zh-TW" dirty="0"/>
           </a:p>
           <a:p>
@@ -6229,7 +6182,7 @@
             <a:pPr lvl="1"/>
             <a:r>
               <a:rPr lang="en-US" altLang="zh-TW" dirty="0"/>
-              <a:t>Registration: from Mar. 10, 2025</a:t>
+              <a:t>Registration: from Apr. 28, 2026</a:t>
             </a:r>
           </a:p>
           <a:p>
@@ -6244,14 +6197,14 @@
                   <a:srgbClr val="FF0000"/>
                 </a:solidFill>
               </a:rPr>
-              <a:t>12:00pm, Jun. 8, 2025</a:t>
+              <a:t>Jun. 17, 2026</a:t>
             </a:r>
           </a:p>
           <a:p>
             <a:pPr lvl="1"/>
             <a:r>
               <a:rPr lang="en-US" altLang="zh-TW" dirty="0"/>
-              <a:t>Announcement of final result: Jul. 16, 2025</a:t>
+              <a:t>Announcement of final result: Jul. 23, 2026</a:t>
             </a:r>
           </a:p>
           <a:p>
@@ -6288,7 +6241,7 @@
           <a:p>
             <a:r>
               <a:rPr lang="en-US" altLang="zh-TW"/>
-              <a:t>Natural Language Processing and Text Mining, Spring 2025</a:t>
+              <a:t>Natural Language Processing and Text Mining, Spring 2026</a:t>
             </a:r>
             <a:endParaRPr lang="zh-TW" altLang="en-US"/>
           </a:p>
@@ -6447,7 +6400,7 @@
           <a:p>
             <a:r>
               <a:rPr lang="en-US" altLang="zh-TW"/>
-              <a:t>Natural Language Processing and Text Mining, Spring 2025</a:t>
+              <a:t>Natural Language Processing and Text Mining, Spring 2026</a:t>
             </a:r>
             <a:endParaRPr lang="zh-TW" altLang="en-US"/>
           </a:p>
